--- a/assemblies-and-events/valentines-day-sweet-notes/downloads/Valentines_Day_Sweet_Notes.pptx
+++ b/assemblies-and-events/valentines-day-sweet-notes/downloads/Valentines_Day_Sweet_Notes.pptx
@@ -3289,7 +3289,7 @@
                 </a:solidFill>
                 <a:latin typeface="Karla"/>
               </a:rPr>
-              <a:t>A Valentines Event</a:t>
+              <a:t>A Valentine’s Event</a:t>
             </a:r>
           </a:p>
         </p:txBody>
@@ -4301,7 +4301,7 @@
                 </a:solidFill>
                 <a:latin typeface="Karla"/>
               </a:rPr>
-              <a:t>A Valentines Event</a:t>
+              <a:t>A Valentine’s Event</a:t>
             </a:r>
           </a:p>
         </p:txBody>
@@ -5119,7 +5119,7 @@
                 </a:solidFill>
                 <a:latin typeface="Karla"/>
               </a:rPr>
-              <a:t>A few words and a minute of your time. That is all it costs.</a:t>
+              <a:t>A few words and a minute of your time.</a:t>
             </a:r>
           </a:p>
         </p:txBody>
@@ -6265,7 +6265,7 @@
                 </a:solidFill>
                 <a:latin typeface="Karla"/>
               </a:rPr>
-              <a:t>Come to the stall, write your note, and we do the rest. Every [ PRICE ] goes to [ CHARITY ].</a:t>
+              <a:t>Come to the stall, write your note, and we do the rest. The money raised goes to [ CHARITY ].</a:t>
             </a:r>
           </a:p>
         </p:txBody>
@@ -7531,7 +7531,7 @@
                 </a:solidFill>
                 <a:latin typeface="Karla"/>
               </a:rPr>
-              <a:t>So the person reading it spends the morning thinking about what it says, not about who sent it. That is what makes it work.</a:t>
+              <a:t>So the person reading it thinks about what it says, not who sent it. An adult reads every note before it goes out.</a:t>
             </a:r>
           </a:p>
         </p:txBody>

--- a/assemblies-and-events/valentines-day-sweet-notes/downloads/Valentines_Day_Sweet_Notes.pptx
+++ b/assemblies-and-events/valentines-day-sweet-notes/downloads/Valentines_Day_Sweet_Notes.pptx
@@ -6526,22 +6526,22 @@
       </p:sp>
       <p:pic>
         <p:nvPicPr>
-          <p:cNvPr id="5" name="Picture 4" descr="bag_plain.png"/>
+          <p:cNvPr id="24" name="Sweet Notes bag photo" descr="deckbag.png"/>
           <p:cNvPicPr>
             <a:picLocks noChangeAspect="1"/>
           </p:cNvPicPr>
           <p:nvPr/>
         </p:nvPicPr>
         <p:blipFill>
-          <a:blip r:embed="rId2"/>
+          <a:blip r:embed="rId4"/>
           <a:stretch>
             <a:fillRect/>
           </a:stretch>
         </p:blipFill>
         <p:spPr>
           <a:xfrm>
-            <a:off x="1005840" y="1664208"/>
-            <a:ext cx="2656928" cy="2798064"/>
+            <a:off x="1048166" y="1664208"/>
+            <a:ext cx="2572275" cy="2798064"/>
           </a:xfrm>
           <a:prstGeom prst="rect">
             <a:avLst/>

--- a/assemblies-and-events/valentines-day-sweet-notes/downloads/Valentines_Day_Sweet_Notes.pptx
+++ b/assemblies-and-events/valentines-day-sweet-notes/downloads/Valentines_Day_Sweet_Notes.pptx
@@ -3197,11 +3197,11 @@
               </a:spcAft>
             </a:pPr>
             <a:r>
-              <a:rPr sz="5400" b="1" i="0">
+              <a:rPr sz="5400" b="0" i="0">
                 <a:solidFill>
                   <a:srgbClr val="94505F"/>
                 </a:solidFill>
-                <a:latin typeface="Libre Caslon Display"/>
+                <a:latin typeface="Georgia"/>
               </a:rPr>
               <a:t>Sweet Notes</a:t>
             </a:r>
@@ -3287,7 +3287,7 @@
                 <a:solidFill>
                   <a:srgbClr val="7C6C69"/>
                 </a:solidFill>
-                <a:latin typeface="Karla"/>
+                <a:latin typeface="Calibri"/>
               </a:rPr>
               <a:t>A Valentine’s Event</a:t>
             </a:r>
@@ -3329,7 +3329,7 @@
                 <a:solidFill>
                   <a:srgbClr val="A99B97"/>
                 </a:solidFill>
-                <a:latin typeface="Karla"/>
+                <a:latin typeface="Calibri"/>
               </a:rPr>
               <a:t>A hot chocolate and a handwritten note, delivered to someone who is not expecting one.</a:t>
             </a:r>
@@ -3395,7 +3395,7 @@
                 <a:solidFill>
                   <a:srgbClr val="A99B97"/>
                 </a:solidFill>
-                <a:latin typeface="Karla"/>
+                <a:latin typeface="Calibri"/>
               </a:rPr>
               <a:t>The Pastoral Guide</a:t>
             </a:r>
@@ -3437,7 +3437,7 @@
                 <a:solidFill>
                   <a:srgbClr val="A99B97"/>
                 </a:solidFill>
-                <a:latin typeface="Karla"/>
+                <a:latin typeface="Calibri"/>
               </a:rPr>
               <a:t>1 / 11</a:t>
             </a:r>
@@ -3541,7 +3541,7 @@
                 <a:solidFill>
                   <a:srgbClr val="94505F"/>
                 </a:solidFill>
-                <a:latin typeface="Karla"/>
+                <a:latin typeface="Calibri"/>
               </a:rPr>
               <a:t>DO NOT LEAVE IT TOO LATE</a:t>
             </a:r>
@@ -3579,11 +3579,11 @@
               </a:spcAft>
             </a:pPr>
             <a:r>
-              <a:rPr sz="3000" b="1" i="0">
+              <a:rPr sz="3000" b="0" i="0">
                 <a:solidFill>
                   <a:srgbClr val="453B3A"/>
                 </a:solidFill>
-                <a:latin typeface="Libre Caslon Display"/>
+                <a:latin typeface="Georgia"/>
               </a:rPr>
               <a:t>Three dates to remember</a:t>
             </a:r>
@@ -3673,7 +3673,7 @@
                 <a:solidFill>
                   <a:srgbClr val="453B3A"/>
                 </a:solidFill>
-                <a:latin typeface="Karla"/>
+                <a:latin typeface="Calibri"/>
               </a:rPr>
               <a:t>The stall opens</a:t>
             </a:r>
@@ -3711,11 +3711,11 @@
               </a:spcAft>
             </a:pPr>
             <a:r>
-              <a:rPr sz="1600" b="1" i="0">
+              <a:rPr sz="1600" b="0" i="0">
                 <a:solidFill>
                   <a:srgbClr val="94505F"/>
                 </a:solidFill>
-                <a:latin typeface="Libre Caslon Display"/>
+                <a:latin typeface="Georgia"/>
               </a:rPr>
               <a:t>[ DATE ]</a:t>
             </a:r>
@@ -3805,7 +3805,7 @@
                 <a:solidFill>
                   <a:srgbClr val="453B3A"/>
                 </a:solidFill>
-                <a:latin typeface="Karla"/>
+                <a:latin typeface="Calibri"/>
               </a:rPr>
               <a:t>Last chance to send one</a:t>
             </a:r>
@@ -3843,11 +3843,11 @@
               </a:spcAft>
             </a:pPr>
             <a:r>
-              <a:rPr sz="1600" b="1" i="0">
+              <a:rPr sz="1600" b="0" i="0">
                 <a:solidFill>
                   <a:srgbClr val="94505F"/>
                 </a:solidFill>
-                <a:latin typeface="Libre Caslon Display"/>
+                <a:latin typeface="Georgia"/>
               </a:rPr>
               <a:t>[ DATE ]</a:t>
             </a:r>
@@ -3937,7 +3937,7 @@
                 <a:solidFill>
                   <a:srgbClr val="453B3A"/>
                 </a:solidFill>
-                <a:latin typeface="Karla"/>
+                <a:latin typeface="Calibri"/>
               </a:rPr>
               <a:t>Delivered to your form, first thing</a:t>
             </a:r>
@@ -3975,11 +3975,11 @@
               </a:spcAft>
             </a:pPr>
             <a:r>
-              <a:rPr sz="1600" b="1" i="0">
+              <a:rPr sz="1600" b="0" i="0">
                 <a:solidFill>
                   <a:srgbClr val="94505F"/>
                 </a:solidFill>
-                <a:latin typeface="Libre Caslon Display"/>
+                <a:latin typeface="Georgia"/>
               </a:rPr>
               <a:t>[ 14 FEBRUARY ]</a:t>
             </a:r>
@@ -4045,7 +4045,7 @@
                 <a:solidFill>
                   <a:srgbClr val="A99B97"/>
                 </a:solidFill>
-                <a:latin typeface="Karla"/>
+                <a:latin typeface="Calibri"/>
               </a:rPr>
               <a:t>The Pastoral Guide</a:t>
             </a:r>
@@ -4087,7 +4087,7 @@
                 <a:solidFill>
                   <a:srgbClr val="A99B97"/>
                 </a:solidFill>
-                <a:latin typeface="Karla"/>
+                <a:latin typeface="Calibri"/>
               </a:rPr>
               <a:t>10 / 11</a:t>
             </a:r>
@@ -4211,11 +4211,11 @@
               </a:spcAft>
             </a:pPr>
             <a:r>
-              <a:rPr sz="2800" b="1" i="0">
+              <a:rPr sz="2800" b="0" i="0">
                 <a:solidFill>
                   <a:srgbClr val="94505F"/>
                 </a:solidFill>
-                <a:latin typeface="Libre Caslon Display"/>
+                <a:latin typeface="Georgia"/>
               </a:rPr>
               <a:t>One bag. One note. One morning.</a:t>
             </a:r>
@@ -4257,7 +4257,7 @@
                 <a:solidFill>
                   <a:srgbClr val="7C6C69"/>
                 </a:solidFill>
-                <a:latin typeface="Karla"/>
+                <a:latin typeface="Calibri"/>
               </a:rPr>
               <a:t>Someone in this room is going to have a much better day because of a minute of your time.</a:t>
             </a:r>
@@ -4299,7 +4299,7 @@
                 <a:solidFill>
                   <a:srgbClr val="A99B97"/>
                 </a:solidFill>
-                <a:latin typeface="Karla"/>
+                <a:latin typeface="Calibri"/>
               </a:rPr>
               <a:t>A Valentine’s Event</a:t>
             </a:r>
@@ -4365,7 +4365,7 @@
                 <a:solidFill>
                   <a:srgbClr val="A99B97"/>
                 </a:solidFill>
-                <a:latin typeface="Karla"/>
+                <a:latin typeface="Calibri"/>
               </a:rPr>
               <a:t>The Pastoral Guide</a:t>
             </a:r>
@@ -4407,7 +4407,7 @@
                 <a:solidFill>
                   <a:srgbClr val="A99B97"/>
                 </a:solidFill>
-                <a:latin typeface="Karla"/>
+                <a:latin typeface="Calibri"/>
               </a:rPr>
               <a:t>11 / 11</a:t>
             </a:r>
@@ -4511,7 +4511,7 @@
                 <a:solidFill>
                   <a:srgbClr val="94505F"/>
                 </a:solidFill>
-                <a:latin typeface="Karla"/>
+                <a:latin typeface="Calibri"/>
               </a:rPr>
               <a:t>TO START WITH</a:t>
             </a:r>
@@ -4617,11 +4617,11 @@
               </a:spcAft>
             </a:pPr>
             <a:r>
-              <a:rPr sz="3000" b="1" i="0">
+              <a:rPr sz="3000" b="0" i="0">
                 <a:solidFill>
                   <a:srgbClr val="453B3A"/>
                 </a:solidFill>
-                <a:latin typeface="Libre Caslon Display"/>
+                <a:latin typeface="Georgia"/>
               </a:rPr>
               <a:t>When did someone last tell you something good about you?</a:t>
             </a:r>
@@ -4663,7 +4663,7 @@
                 <a:solidFill>
                   <a:srgbClr val="7C6C69"/>
                 </a:solidFill>
-                <a:latin typeface="Karla"/>
+                <a:latin typeface="Calibri"/>
               </a:rPr>
               <a:t>Have a think. Not a compliment about your shoes. Something about you.</a:t>
             </a:r>
@@ -4729,7 +4729,7 @@
                 <a:solidFill>
                   <a:srgbClr val="A99B97"/>
                 </a:solidFill>
-                <a:latin typeface="Karla"/>
+                <a:latin typeface="Calibri"/>
               </a:rPr>
               <a:t>The Pastoral Guide</a:t>
             </a:r>
@@ -4771,7 +4771,7 @@
                 <a:solidFill>
                   <a:srgbClr val="A99B97"/>
                 </a:solidFill>
-                <a:latin typeface="Karla"/>
+                <a:latin typeface="Calibri"/>
               </a:rPr>
               <a:t>2 / 11</a:t>
             </a:r>
@@ -4875,7 +4875,7 @@
                 <a:solidFill>
                   <a:srgbClr val="94505F"/>
                 </a:solidFill>
-                <a:latin typeface="Karla"/>
+                <a:latin typeface="Calibri"/>
               </a:rPr>
               <a:t>THE THING ABOUT KINDNESS</a:t>
             </a:r>
@@ -4913,11 +4913,11 @@
               </a:spcAft>
             </a:pPr>
             <a:r>
-              <a:rPr sz="3000" b="1" i="0">
+              <a:rPr sz="3000" b="0" i="0">
                 <a:solidFill>
                   <a:srgbClr val="453B3A"/>
                 </a:solidFill>
-                <a:latin typeface="Libre Caslon Display"/>
+                <a:latin typeface="Georgia"/>
               </a:rPr>
               <a:t>It is worth more than it costs</a:t>
             </a:r>
@@ -5071,11 +5071,11 @@
               </a:spcAft>
             </a:pPr>
             <a:r>
-              <a:rPr sz="1500" b="1" i="0">
+              <a:rPr sz="1500" b="0" i="0">
                 <a:solidFill>
                   <a:srgbClr val="94505F"/>
                 </a:solidFill>
-                <a:latin typeface="Libre Caslon Display"/>
+                <a:latin typeface="Georgia"/>
               </a:rPr>
               <a:t>It costs almost nothing</a:t>
             </a:r>
@@ -5117,7 +5117,7 @@
                 <a:solidFill>
                   <a:srgbClr val="7C6C69"/>
                 </a:solidFill>
-                <a:latin typeface="Karla"/>
+                <a:latin typeface="Calibri"/>
               </a:rPr>
               <a:t>A few words and a minute of your time.</a:t>
             </a:r>
@@ -5271,11 +5271,11 @@
               </a:spcAft>
             </a:pPr>
             <a:r>
-              <a:rPr sz="1500" b="1" i="0">
+              <a:rPr sz="1500" b="0" i="0">
                 <a:solidFill>
                   <a:srgbClr val="94505F"/>
                 </a:solidFill>
-                <a:latin typeface="Libre Caslon Display"/>
+                <a:latin typeface="Georgia"/>
               </a:rPr>
               <a:t>It lasts far longer than you think</a:t>
             </a:r>
@@ -5317,7 +5317,7 @@
                 <a:solidFill>
                   <a:srgbClr val="7C6C69"/>
                 </a:solidFill>
-                <a:latin typeface="Karla"/>
+                <a:latin typeface="Calibri"/>
               </a:rPr>
               <a:t>People remember a kind thing said to them long after the person who said it has forgotten.</a:t>
             </a:r>
@@ -5471,11 +5471,11 @@
               </a:spcAft>
             </a:pPr>
             <a:r>
-              <a:rPr sz="1500" b="1" i="0">
+              <a:rPr sz="1500" b="0" i="0">
                 <a:solidFill>
                   <a:srgbClr val="94505F"/>
                 </a:solidFill>
-                <a:latin typeface="Libre Caslon Display"/>
+                <a:latin typeface="Georgia"/>
               </a:rPr>
               <a:t>It comes back to you</a:t>
             </a:r>
@@ -5517,7 +5517,7 @@
                 <a:solidFill>
                   <a:srgbClr val="7C6C69"/>
                 </a:solidFill>
-                <a:latin typeface="Karla"/>
+                <a:latin typeface="Calibri"/>
               </a:rPr>
               <a:t>Being the one who said it feels almost as good as being the one who heard it.</a:t>
             </a:r>
@@ -5583,7 +5583,7 @@
                 <a:solidFill>
                   <a:srgbClr val="A99B97"/>
                 </a:solidFill>
-                <a:latin typeface="Karla"/>
+                <a:latin typeface="Calibri"/>
               </a:rPr>
               <a:t>The Pastoral Guide</a:t>
             </a:r>
@@ -5625,7 +5625,7 @@
                 <a:solidFill>
                   <a:srgbClr val="A99B97"/>
                 </a:solidFill>
-                <a:latin typeface="Karla"/>
+                <a:latin typeface="Calibri"/>
               </a:rPr>
               <a:t>3 / 11</a:t>
             </a:r>
@@ -5725,11 +5725,11 @@
               </a:spcAft>
             </a:pPr>
             <a:r>
-              <a:rPr sz="2900" b="1" i="0">
+              <a:rPr sz="2900" b="0" i="0">
                 <a:solidFill>
                   <a:srgbClr val="FFFDF7"/>
                 </a:solidFill>
-                <a:latin typeface="Libre Caslon Display"/>
+                <a:latin typeface="Georgia"/>
               </a:rPr>
               <a:t>The people who need it most</a:t>
             </a:r>
@@ -5744,11 +5744,11 @@
               </a:spcAft>
             </a:pPr>
             <a:r>
-              <a:rPr sz="2900" b="1" i="0">
+              <a:rPr sz="2900" b="0" i="0">
                 <a:solidFill>
                   <a:srgbClr val="FFFDF7"/>
                 </a:solidFill>
-                <a:latin typeface="Libre Caslon Display"/>
+                <a:latin typeface="Georgia"/>
               </a:rPr>
               <a:t>are the ones least likely to ask.</a:t>
             </a:r>
@@ -5834,7 +5834,7 @@
                 <a:solidFill>
                   <a:srgbClr val="E8CBD2"/>
                 </a:solidFill>
-                <a:latin typeface="Karla"/>
+                <a:latin typeface="Calibri"/>
               </a:rPr>
               <a:t>You cannot always tell who is having a hard week. Most people are quite good at hiding it.</a:t>
             </a:r>
@@ -5900,7 +5900,7 @@
                 <a:solidFill>
                   <a:srgbClr val="E8CBD2"/>
                 </a:solidFill>
-                <a:latin typeface="Karla"/>
+                <a:latin typeface="Calibri"/>
               </a:rPr>
               <a:t>The Pastoral Guide</a:t>
             </a:r>
@@ -5942,7 +5942,7 @@
                 <a:solidFill>
                   <a:srgbClr val="E8CBD2"/>
                 </a:solidFill>
-                <a:latin typeface="Karla"/>
+                <a:latin typeface="Calibri"/>
               </a:rPr>
               <a:t>4 / 11</a:t>
             </a:r>
@@ -6046,7 +6046,7 @@
                 <a:solidFill>
                   <a:srgbClr val="94505F"/>
                 </a:solidFill>
-                <a:latin typeface="Karla"/>
+                <a:latin typeface="Calibri"/>
               </a:rPr>
               <a:t>SO, THIS VALENTINE’S DAY</a:t>
             </a:r>
@@ -6084,11 +6084,11 @@
               </a:spcAft>
             </a:pPr>
             <a:r>
-              <a:rPr sz="4800" b="1" i="0">
+              <a:rPr sz="4800" b="0" i="0">
                 <a:solidFill>
                   <a:srgbClr val="94505F"/>
                 </a:solidFill>
-                <a:latin typeface="Libre Caslon Display"/>
+                <a:latin typeface="Georgia"/>
               </a:rPr>
               <a:t>Sweet Notes</a:t>
             </a:r>
@@ -6130,7 +6130,7 @@
                 <a:solidFill>
                   <a:srgbClr val="453B3A"/>
                 </a:solidFill>
-                <a:latin typeface="Karla"/>
+                <a:latin typeface="Calibri"/>
               </a:rPr>
               <a:t>Send someone a hot chocolate and a note. They will not know it came from you.</a:t>
             </a:r>
@@ -6240,11 +6240,11 @@
               </a:spcAft>
             </a:pPr>
             <a:r>
-              <a:rPr sz="1350" b="1" i="0">
+              <a:rPr sz="1350" b="0" i="0">
                 <a:solidFill>
                   <a:srgbClr val="94505F"/>
                 </a:solidFill>
-                <a:latin typeface="Libre Caslon Display"/>
+                <a:latin typeface="Georgia"/>
               </a:rPr>
               <a:t>Run by students, for students</a:t>
             </a:r>
@@ -6263,7 +6263,7 @@
                 <a:solidFill>
                   <a:srgbClr val="7C6C69"/>
                 </a:solidFill>
-                <a:latin typeface="Karla"/>
+                <a:latin typeface="Calibri"/>
               </a:rPr>
               <a:t>Come to the stall, write your note, and we do the rest. The money raised goes to [ CHARITY ].</a:t>
             </a:r>
@@ -6329,7 +6329,7 @@
                 <a:solidFill>
                   <a:srgbClr val="A99B97"/>
                 </a:solidFill>
-                <a:latin typeface="Karla"/>
+                <a:latin typeface="Calibri"/>
               </a:rPr>
               <a:t>The Pastoral Guide</a:t>
             </a:r>
@@ -6371,7 +6371,7 @@
                 <a:solidFill>
                   <a:srgbClr val="A99B97"/>
                 </a:solidFill>
-                <a:latin typeface="Karla"/>
+                <a:latin typeface="Calibri"/>
               </a:rPr>
               <a:t>5 / 11</a:t>
             </a:r>
@@ -6475,7 +6475,7 @@
                 <a:solidFill>
                   <a:srgbClr val="94505F"/>
                 </a:solidFill>
-                <a:latin typeface="Karla"/>
+                <a:latin typeface="Calibri"/>
               </a:rPr>
               <a:t>WHAT THEY GET</a:t>
             </a:r>
@@ -6513,11 +6513,11 @@
               </a:spcAft>
             </a:pPr>
             <a:r>
-              <a:rPr sz="3000" b="1" i="0">
+              <a:rPr sz="3000" b="0" i="0">
                 <a:solidFill>
                   <a:srgbClr val="453B3A"/>
                 </a:solidFill>
-                <a:latin typeface="Libre Caslon Display"/>
+                <a:latin typeface="Georgia"/>
               </a:rPr>
               <a:t>One small bag, three small parts</a:t>
             </a:r>
@@ -6671,11 +6671,11 @@
               </a:spcAft>
             </a:pPr>
             <a:r>
-              <a:rPr sz="1300" b="1" i="0">
+              <a:rPr sz="1300" b="0" i="0">
                 <a:solidFill>
                   <a:srgbClr val="FFFDF7"/>
                 </a:solidFill>
-                <a:latin typeface="Libre Caslon Display"/>
+                <a:latin typeface="Georgia"/>
               </a:rPr>
               <a:t>1</a:t>
             </a:r>
@@ -6713,11 +6713,11 @@
               </a:spcAft>
             </a:pPr>
             <a:r>
-              <a:rPr sz="1300" b="1" i="0">
+              <a:rPr sz="1300" b="0" i="0">
                 <a:solidFill>
                   <a:srgbClr val="94505F"/>
                 </a:solidFill>
-                <a:latin typeface="Libre Caslon Display"/>
+                <a:latin typeface="Georgia"/>
               </a:rPr>
               <a:t>Hot chocolate and marshmallows</a:t>
             </a:r>
@@ -6759,7 +6759,7 @@
                 <a:solidFill>
                   <a:srgbClr val="7C6C69"/>
                 </a:solidFill>
-                <a:latin typeface="Karla"/>
+                <a:latin typeface="Calibri"/>
               </a:rPr>
               <a:t>Enough for one proper mug, tied up in a little bag.</a:t>
             </a:r>
@@ -6889,11 +6889,11 @@
               </a:spcAft>
             </a:pPr>
             <a:r>
-              <a:rPr sz="1300" b="1" i="0">
+              <a:rPr sz="1300" b="0" i="0">
                 <a:solidFill>
                   <a:srgbClr val="FFFDF7"/>
                 </a:solidFill>
-                <a:latin typeface="Libre Caslon Display"/>
+                <a:latin typeface="Georgia"/>
               </a:rPr>
               <a:t>2</a:t>
             </a:r>
@@ -6931,11 +6931,11 @@
               </a:spcAft>
             </a:pPr>
             <a:r>
-              <a:rPr sz="1300" b="1" i="0">
+              <a:rPr sz="1300" b="0" i="0">
                 <a:solidFill>
                   <a:srgbClr val="94505F"/>
                 </a:solidFill>
-                <a:latin typeface="Libre Caslon Display"/>
+                <a:latin typeface="Georgia"/>
               </a:rPr>
               <a:t>A note you write yourself</a:t>
             </a:r>
@@ -6977,7 +6977,7 @@
                 <a:solidFill>
                   <a:srgbClr val="7C6C69"/>
                 </a:solidFill>
-                <a:latin typeface="Karla"/>
+                <a:latin typeface="Calibri"/>
               </a:rPr>
               <a:t>Your own words, in your own handwriting. That is the part they keep.</a:t>
             </a:r>
@@ -7107,11 +7107,11 @@
               </a:spcAft>
             </a:pPr>
             <a:r>
-              <a:rPr sz="1300" b="1" i="0">
+              <a:rPr sz="1300" b="0" i="0">
                 <a:solidFill>
                   <a:srgbClr val="FFFDF7"/>
                 </a:solidFill>
-                <a:latin typeface="Libre Caslon Display"/>
+                <a:latin typeface="Georgia"/>
               </a:rPr>
               <a:t>3</a:t>
             </a:r>
@@ -7149,11 +7149,11 @@
               </a:spcAft>
             </a:pPr>
             <a:r>
-              <a:rPr sz="1300" b="1" i="0">
+              <a:rPr sz="1300" b="0" i="0">
                 <a:solidFill>
                   <a:srgbClr val="94505F"/>
                 </a:solidFill>
-                <a:latin typeface="Libre Caslon Display"/>
+                <a:latin typeface="Georgia"/>
               </a:rPr>
               <a:t>Handed to them on the day</a:t>
             </a:r>
@@ -7195,7 +7195,7 @@
                 <a:solidFill>
                   <a:srgbClr val="7C6C69"/>
                 </a:solidFill>
-                <a:latin typeface="Karla"/>
+                <a:latin typeface="Calibri"/>
               </a:rPr>
               <a:t>Sorted by form the night before and delivered before registration.</a:t>
             </a:r>
@@ -7261,7 +7261,7 @@
                 <a:solidFill>
                   <a:srgbClr val="A99B97"/>
                 </a:solidFill>
-                <a:latin typeface="Karla"/>
+                <a:latin typeface="Calibri"/>
               </a:rPr>
               <a:t>The Pastoral Guide</a:t>
             </a:r>
@@ -7303,7 +7303,7 @@
                 <a:solidFill>
                   <a:srgbClr val="A99B97"/>
                 </a:solidFill>
-                <a:latin typeface="Karla"/>
+                <a:latin typeface="Calibri"/>
               </a:rPr>
               <a:t>6 / 11</a:t>
             </a:r>
@@ -7407,7 +7407,7 @@
                 <a:solidFill>
                   <a:srgbClr val="94505F"/>
                 </a:solidFill>
-                <a:latin typeface="Karla"/>
+                <a:latin typeface="Calibri"/>
               </a:rPr>
               <a:t>ONE RULE</a:t>
             </a:r>
@@ -7445,11 +7445,11 @@
               </a:spcAft>
             </a:pPr>
             <a:r>
-              <a:rPr sz="3200" b="1" i="0">
+              <a:rPr sz="3200" b="0" i="0">
                 <a:solidFill>
                   <a:srgbClr val="453B3A"/>
                 </a:solidFill>
-                <a:latin typeface="Libre Caslon Display"/>
+                <a:latin typeface="Georgia"/>
               </a:rPr>
               <a:t>You do not sign it</a:t>
             </a:r>
@@ -7491,7 +7491,7 @@
                 <a:solidFill>
                   <a:srgbClr val="453B3A"/>
                 </a:solidFill>
-                <a:latin typeface="Karla"/>
+                <a:latin typeface="Calibri"/>
               </a:rPr>
               <a:t>Every note is signed the same way: </a:t>
             </a:r>
@@ -7506,11 +7506,11 @@
               </a:spcAft>
             </a:pPr>
             <a:r>
-              <a:rPr sz="1900" b="1" i="0">
+              <a:rPr sz="1900" b="0" i="0">
                 <a:solidFill>
                   <a:srgbClr val="94505F"/>
                 </a:solidFill>
-                <a:latin typeface="Libre Caslon Display"/>
+                <a:latin typeface="Georgia"/>
               </a:rPr>
               <a:t>From: Anonymous</a:t>
             </a:r>
@@ -7529,7 +7529,7 @@
                 <a:solidFill>
                   <a:srgbClr val="7C6C69"/>
                 </a:solidFill>
-                <a:latin typeface="Karla"/>
+                <a:latin typeface="Calibri"/>
               </a:rPr>
               <a:t>So the person reading it thinks about what it says, not who sent it. An adult reads every note before it goes out.</a:t>
             </a:r>
@@ -7819,7 +7819,7 @@
                 <a:solidFill>
                   <a:srgbClr val="94505F"/>
                 </a:solidFill>
-                <a:latin typeface="Karla"/>
+                <a:latin typeface="Calibri"/>
               </a:rPr>
               <a:t>From: Anonymous</a:t>
             </a:r>
@@ -7861,7 +7861,7 @@
                 <a:solidFill>
                   <a:srgbClr val="A99B97"/>
                 </a:solidFill>
-                <a:latin typeface="Karla"/>
+                <a:latin typeface="Calibri"/>
               </a:rPr>
               <a:t>the note on every bag</a:t>
             </a:r>
@@ -7927,7 +7927,7 @@
                 <a:solidFill>
                   <a:srgbClr val="A99B97"/>
                 </a:solidFill>
-                <a:latin typeface="Karla"/>
+                <a:latin typeface="Calibri"/>
               </a:rPr>
               <a:t>The Pastoral Guide</a:t>
             </a:r>
@@ -7969,7 +7969,7 @@
                 <a:solidFill>
                   <a:srgbClr val="A99B97"/>
                 </a:solidFill>
-                <a:latin typeface="Karla"/>
+                <a:latin typeface="Calibri"/>
               </a:rPr>
               <a:t>7 / 11</a:t>
             </a:r>
@@ -8073,7 +8073,7 @@
                 <a:solidFill>
                   <a:srgbClr val="94505F"/>
                 </a:solidFill>
-                <a:latin typeface="Karla"/>
+                <a:latin typeface="Calibri"/>
               </a:rPr>
               <a:t>BEFORE YOU DECIDE</a:t>
             </a:r>
@@ -8111,11 +8111,11 @@
               </a:spcAft>
             </a:pPr>
             <a:r>
-              <a:rPr sz="3000" b="1" i="0">
+              <a:rPr sz="3000" b="0" i="0">
                 <a:solidFill>
                   <a:srgbClr val="453B3A"/>
                 </a:solidFill>
-                <a:latin typeface="Libre Caslon Display"/>
+                <a:latin typeface="Georgia"/>
               </a:rPr>
               <a:t>Who will you send one to?</a:t>
             </a:r>
@@ -8157,7 +8157,7 @@
                 <a:solidFill>
                   <a:srgbClr val="7C6C69"/>
                 </a:solidFill>
-                <a:latin typeface="Karla"/>
+                <a:latin typeface="Calibri"/>
               </a:rPr>
               <a:t>Your best friend already knows. Have a think about someone who does not.</a:t>
             </a:r>
@@ -8287,11 +8287,11 @@
               </a:spcAft>
             </a:pPr>
             <a:r>
-              <a:rPr sz="1400" b="1" i="0">
+              <a:rPr sz="1400" b="0" i="0">
                 <a:solidFill>
                   <a:srgbClr val="FFFDF7"/>
                 </a:solidFill>
-                <a:latin typeface="Libre Caslon Display"/>
+                <a:latin typeface="Georgia"/>
               </a:rPr>
               <a:t>1</a:t>
             </a:r>
@@ -8333,7 +8333,7 @@
                 <a:solidFill>
                   <a:srgbClr val="453B3A"/>
                 </a:solidFill>
-                <a:latin typeface="Karla"/>
+                <a:latin typeface="Calibri"/>
               </a:rPr>
               <a:t>Someone who joined this year and is still finding their feet.</a:t>
             </a:r>
@@ -8463,11 +8463,11 @@
               </a:spcAft>
             </a:pPr>
             <a:r>
-              <a:rPr sz="1400" b="1" i="0">
+              <a:rPr sz="1400" b="0" i="0">
                 <a:solidFill>
                   <a:srgbClr val="FFFDF7"/>
                 </a:solidFill>
-                <a:latin typeface="Libre Caslon Display"/>
+                <a:latin typeface="Georgia"/>
               </a:rPr>
               <a:t>2</a:t>
             </a:r>
@@ -8509,7 +8509,7 @@
                 <a:solidFill>
                   <a:srgbClr val="453B3A"/>
                 </a:solidFill>
-                <a:latin typeface="Karla"/>
+                <a:latin typeface="Calibri"/>
               </a:rPr>
               <a:t>Someone who has had a harder term than they have let on.</a:t>
             </a:r>
@@ -8639,11 +8639,11 @@
               </a:spcAft>
             </a:pPr>
             <a:r>
-              <a:rPr sz="1400" b="1" i="0">
+              <a:rPr sz="1400" b="0" i="0">
                 <a:solidFill>
                   <a:srgbClr val="FFFDF7"/>
                 </a:solidFill>
-                <a:latin typeface="Libre Caslon Display"/>
+                <a:latin typeface="Georgia"/>
               </a:rPr>
               <a:t>3</a:t>
             </a:r>
@@ -8685,7 +8685,7 @@
                 <a:solidFill>
                   <a:srgbClr val="453B3A"/>
                 </a:solidFill>
-                <a:latin typeface="Karla"/>
+                <a:latin typeface="Calibri"/>
               </a:rPr>
               <a:t>Someone who is kind to everyone and never gets told.</a:t>
             </a:r>
@@ -8815,11 +8815,11 @@
               </a:spcAft>
             </a:pPr>
             <a:r>
-              <a:rPr sz="1400" b="1" i="0">
+              <a:rPr sz="1400" b="0" i="0">
                 <a:solidFill>
                   <a:srgbClr val="FFFDF7"/>
                 </a:solidFill>
-                <a:latin typeface="Libre Caslon Display"/>
+                <a:latin typeface="Georgia"/>
               </a:rPr>
               <a:t>4</a:t>
             </a:r>
@@ -8861,7 +8861,7 @@
                 <a:solidFill>
                   <a:srgbClr val="453B3A"/>
                 </a:solidFill>
-                <a:latin typeface="Karla"/>
+                <a:latin typeface="Calibri"/>
               </a:rPr>
               <a:t>Someone you have sat near all year and never spoken to.</a:t>
             </a:r>
@@ -8927,7 +8927,7 @@
                 <a:solidFill>
                   <a:srgbClr val="A99B97"/>
                 </a:solidFill>
-                <a:latin typeface="Karla"/>
+                <a:latin typeface="Calibri"/>
               </a:rPr>
               <a:t>The Pastoral Guide</a:t>
             </a:r>
@@ -8969,7 +8969,7 @@
                 <a:solidFill>
                   <a:srgbClr val="A99B97"/>
                 </a:solidFill>
-                <a:latin typeface="Karla"/>
+                <a:latin typeface="Calibri"/>
               </a:rPr>
               <a:t>8 / 11</a:t>
             </a:r>
@@ -9073,7 +9073,7 @@
                 <a:solidFill>
                   <a:srgbClr val="94505F"/>
                 </a:solidFill>
-                <a:latin typeface="Karla"/>
+                <a:latin typeface="Calibri"/>
               </a:rPr>
               <a:t>HOW TO SEND ONE</a:t>
             </a:r>
@@ -9111,11 +9111,11 @@
               </a:spcAft>
             </a:pPr>
             <a:r>
-              <a:rPr sz="3000" b="1" i="0">
+              <a:rPr sz="3000" b="0" i="0">
                 <a:solidFill>
                   <a:srgbClr val="453B3A"/>
                 </a:solidFill>
-                <a:latin typeface="Libre Caslon Display"/>
+                <a:latin typeface="Georgia"/>
               </a:rPr>
               <a:t>Come to the stall</a:t>
             </a:r>
@@ -9157,7 +9157,7 @@
                 <a:solidFill>
                   <a:srgbClr val="A99B97"/>
                 </a:solidFill>
-                <a:latin typeface="Karla"/>
+                <a:latin typeface="Calibri"/>
               </a:rPr>
               <a:t>Replace anything in [ brackets ] with your own dates, place and price before you show this.</a:t>
             </a:r>
@@ -9311,11 +9311,11 @@
               </a:spcAft>
             </a:pPr>
             <a:r>
-              <a:rPr sz="1500" b="1" i="0">
+              <a:rPr sz="1500" b="0" i="0">
                 <a:solidFill>
                   <a:srgbClr val="94505F"/>
                 </a:solidFill>
-                <a:latin typeface="Libre Caslon Display"/>
+                <a:latin typeface="Georgia"/>
               </a:rPr>
               <a:t>Find us</a:t>
             </a:r>
@@ -9357,7 +9357,7 @@
                 <a:solidFill>
                   <a:srgbClr val="7C6C69"/>
                 </a:solidFill>
-                <a:latin typeface="Karla"/>
+                <a:latin typeface="Calibri"/>
               </a:rPr>
               <a:t>The Sweet Notes stall is in [ PLACE ], at [ TIME ], from [ DATE ] to [ DATE ].</a:t>
             </a:r>
@@ -9511,11 +9511,11 @@
               </a:spcAft>
             </a:pPr>
             <a:r>
-              <a:rPr sz="1500" b="1" i="0">
+              <a:rPr sz="1500" b="0" i="0">
                 <a:solidFill>
                   <a:srgbClr val="94505F"/>
                 </a:solidFill>
-                <a:latin typeface="Libre Caslon Display"/>
+                <a:latin typeface="Georgia"/>
               </a:rPr>
               <a:t>Write it there</a:t>
             </a:r>
@@ -9557,7 +9557,7 @@
                 <a:solidFill>
                   <a:srgbClr val="7C6C69"/>
                 </a:solidFill>
-                <a:latin typeface="Karla"/>
+                <a:latin typeface="Calibri"/>
               </a:rPr>
               <a:t>Bring [ PRICE ]. You write your note at the stall, fold it, and hand it back.</a:t>
             </a:r>
@@ -9711,11 +9711,11 @@
               </a:spcAft>
             </a:pPr>
             <a:r>
-              <a:rPr sz="1500" b="1" i="0">
+              <a:rPr sz="1500" b="0" i="0">
                 <a:solidFill>
                   <a:srgbClr val="94505F"/>
                 </a:solidFill>
-                <a:latin typeface="Libre Caslon Display"/>
+                <a:latin typeface="Georgia"/>
               </a:rPr>
               <a:t>We do the rest</a:t>
             </a:r>
@@ -9757,7 +9757,7 @@
                 <a:solidFill>
                   <a:srgbClr val="7C6C69"/>
                 </a:solidFill>
-                <a:latin typeface="Karla"/>
+                <a:latin typeface="Calibri"/>
               </a:rPr>
               <a:t>We tie it to a bag and deliver it on the morning of [ 14 FEBRUARY ].</a:t>
             </a:r>
@@ -9823,7 +9823,7 @@
                 <a:solidFill>
                   <a:srgbClr val="A99B97"/>
                 </a:solidFill>
-                <a:latin typeface="Karla"/>
+                <a:latin typeface="Calibri"/>
               </a:rPr>
               <a:t>The Pastoral Guide</a:t>
             </a:r>
@@ -9865,7 +9865,7 @@
                 <a:solidFill>
                   <a:srgbClr val="A99B97"/>
                 </a:solidFill>
-                <a:latin typeface="Karla"/>
+                <a:latin typeface="Calibri"/>
               </a:rPr>
               <a:t>9 / 11</a:t>
             </a:r>
